--- a/material/[SeSAC_YDP_6] 27_React_ref_lifecycle.pptx
+++ b/material/[SeSAC_YDP_6] 27_React_ref_lifecycle.pptx
@@ -625,6 +625,48 @@
         <p:txBody>
           <a:bodyPr/>
           <a:lstStyle/>
+          <a:p>
+            <a:r>
+              <a:rPr lang="ko-KR" altLang="en-US" dirty="0"/>
+              <a:t>레거시 코드</a:t>
+            </a:r>
+            <a:r>
+              <a:rPr lang="en-US" altLang="ko-KR" dirty="0"/>
+              <a:t>(legacy code)</a:t>
+            </a:r>
+            <a:r>
+              <a:rPr lang="ko-KR" altLang="en-US" dirty="0"/>
+              <a:t>는 일반적으로 오래된 소프트웨어 시스템이나 애플리케이션에서 사용되고 있는 코드베이스를 말합니다</a:t>
+            </a:r>
+            <a:r>
+              <a:rPr lang="en-US" altLang="ko-KR" dirty="0"/>
+              <a:t>. </a:t>
+            </a:r>
+            <a:r>
+              <a:rPr lang="ko-KR" altLang="en-US" dirty="0"/>
+              <a:t>이 코드는 다음과 같은 특징을 가질 수 있습니다</a:t>
+            </a:r>
+            <a:r>
+              <a:rPr lang="en-US" altLang="ko-KR" dirty="0"/>
+              <a:t>:</a:t>
+            </a:r>
+          </a:p>
+          <a:p>
+            <a:r>
+              <a:rPr lang="ko-KR" altLang="en-US" b="1" dirty="0"/>
+              <a:t>오래된 기술 스택</a:t>
+            </a:r>
+            <a:r>
+              <a:rPr lang="en-US" altLang="ko-KR" dirty="0"/>
+              <a:t>:</a:t>
+            </a:r>
+          </a:p>
+          <a:p>
+            <a:r>
+              <a:rPr lang="ko-KR" altLang="en-US" dirty="0"/>
+              <a:t>대부분의 경우 현업에서 자주 접하게 되는 코드</a:t>
+            </a:r>
+          </a:p>
           <a:p>
             <a:endParaRPr lang="ko-KR" altLang="en-US" dirty="0"/>
           </a:p>
